--- a/classes/parte-13-seguridad-movil-iot-e-inalambrica/266-seguridad-de-iot-panorama-y-superficie-de-ataque/clase-266-presentacion.pptx
+++ b/classes/parte-13-seguridad-movil-iot-e-inalambrica/266-seguridad-de-iot-panorama-y-superficie-de-ataque/clase-266-presentacion.pptx
@@ -17,6 +17,10 @@
     <p:sldId id="265" r:id="rId16"/>
     <p:sldId id="266" r:id="rId17"/>
     <p:sldId id="267" r:id="rId18"/>
+    <p:sldId id="268" r:id="rId19"/>
+    <p:sldId id="269" r:id="rId20"/>
+    <p:sldId id="270" r:id="rId21"/>
+    <p:sldId id="271" r:id="rId22"/>
   </p:sldIdLst>
   <p:sldSz cx="9144000" cy="6858000" type="screen4x3"/>
   <p:notesSz cx="6858000" cy="9144000"/>
@@ -3198,7 +3202,7 @@
                   <a:srgbClr val="0B3D2E"/>
                 </a:solidFill>
               </a:rPr>
-              <a:t>⚠️ Errores comunes</a:t>
+              <a:t>🧪 Laboratorio guiado</a:t>
             </a:r>
           </a:p>
         </p:txBody>
@@ -3236,67 +3240,97 @@
                   <a:srgbClr val="22282E"/>
                 </a:solidFill>
               </a:rPr>
-              <a:t>•  Nmap no encuentra el dispositivo — Aislamiento de red o firewall; verifica la VLAN y usa -sn</a:t>
-            </a:r>
-          </a:p>
-          <a:p>
-            <a:pPr>
-              <a:spcAft>
-                <a:spcPts val="600"/>
-              </a:spcAft>
-            </a:pPr>
-            <a:r>
-              <a:rPr sz="1500">
-                <a:solidFill>
-                  <a:srgbClr val="22282E"/>
-                </a:solidFill>
-              </a:rPr>
-              <a:t>•  Tráfico a la nube ilegible — Va por TLS; intercéptalo desde la app con proxy y CA propio</a:t>
-            </a:r>
-          </a:p>
-          <a:p>
-            <a:pPr>
-              <a:spcAft>
-                <a:spcPts val="600"/>
-              </a:spcAft>
-            </a:pPr>
-            <a:r>
-              <a:rPr sz="1500">
-                <a:solidFill>
-                  <a:srgbClr val="22282E"/>
-                </a:solidFill>
-              </a:rPr>
-              <a:t>•  El dispositivo deja de funcionar — Escaneo agresivo lo bloqueó; reduce la intensidad (-T2)</a:t>
-            </a:r>
-          </a:p>
-          <a:p>
-            <a:pPr>
-              <a:spcAft>
-                <a:spcPts val="600"/>
-              </a:spcAft>
-            </a:pPr>
-            <a:r>
-              <a:rPr sz="1500">
-                <a:solidFill>
-                  <a:srgbClr val="22282E"/>
-                </a:solidFill>
-              </a:rPr>
-              <a:t>•  No hay puertos abiertos — Solo se comunica saliente a la nube; céntrate en app/API</a:t>
-            </a:r>
-          </a:p>
-          <a:p>
-            <a:pPr>
-              <a:spcAft>
-                <a:spcPts val="600"/>
-              </a:spcAft>
-            </a:pPr>
-            <a:r>
-              <a:rPr sz="1500">
-                <a:solidFill>
-                  <a:srgbClr val="22282E"/>
-                </a:solidFill>
-              </a:rPr>
-              <a:t>•  Emparejamiento falla en laboratorio — Requiere Internet; permite salida controlada y monitorízala</a:t>
+              <a:t>•  Aísla el dispositivo: conéctalo a una red/VLAN de laboratorio sin acceso a tu red principal.</a:t>
+            </a:r>
+          </a:p>
+          <a:p>
+            <a:pPr>
+              <a:spcAft>
+                <a:spcPts val="600"/>
+              </a:spcAft>
+            </a:pPr>
+            <a:r>
+              <a:rPr sz="1500">
+                <a:solidFill>
+                  <a:srgbClr val="22282E"/>
+                </a:solidFill>
+              </a:rPr>
+              <a:t>•  Descubre y enumera: con Nmap identifica IP, puertos abiertos y servicios (Telnet, HTTP, RTSP, UPnP, MQTT).</a:t>
+            </a:r>
+          </a:p>
+          <a:p>
+            <a:pPr>
+              <a:spcAft>
+                <a:spcPts val="600"/>
+              </a:spcAft>
+            </a:pPr>
+            <a:r>
+              <a:rPr sz="1500">
+                <a:solidFill>
+                  <a:srgbClr val="22282E"/>
+                </a:solidFill>
+              </a:rPr>
+              <a:t>•  Captura tráfico: usa tcpdump/Wireshark durante el emparejamiento y el uso normal; identifica protocolos y destinos en la nube.</a:t>
+            </a:r>
+          </a:p>
+          <a:p>
+            <a:pPr>
+              <a:spcAft>
+                <a:spcPts val="600"/>
+              </a:spcAft>
+            </a:pPr>
+            <a:r>
+              <a:rPr sz="1500">
+                <a:solidFill>
+                  <a:srgbClr val="22282E"/>
+                </a:solidFill>
+              </a:rPr>
+              <a:t>•  Analiza la app móvil: aplica lo aprendido en las clases 261–264 para revisar cómo la app se comunica con el dispositivo y la nube.</a:t>
+            </a:r>
+          </a:p>
+          <a:p>
+            <a:pPr>
+              <a:spcAft>
+                <a:spcPts val="600"/>
+              </a:spcAft>
+            </a:pPr>
+            <a:r>
+              <a:rPr sz="1500">
+                <a:solidFill>
+                  <a:srgbClr val="22282E"/>
+                </a:solidFill>
+              </a:rPr>
+              <a:t>•  Prueba las APIs: intercepta con Burp las llamadas a la nube; busca autenticación débil, IDOR o falta de TLS.</a:t>
+            </a:r>
+          </a:p>
+          <a:p>
+            <a:pPr>
+              <a:spcAft>
+                <a:spcPts val="600"/>
+              </a:spcAft>
+            </a:pPr>
+            <a:r>
+              <a:rPr sz="1500">
+                <a:solidFill>
+                  <a:srgbClr val="22282E"/>
+                </a:solidFill>
+              </a:rPr>
+              <a:t>•  Revisa credenciales por defecto: intenta acceso con usuarios/contraseñas típicos documentados del fabricante.</a:t>
+            </a:r>
+          </a:p>
+          <a:p>
+            <a:pPr>
+              <a:spcAft>
+                <a:spcPts val="600"/>
+              </a:spcAft>
+            </a:pPr>
+            <a:r>
+              <a:rPr sz="1500">
+                <a:solidFill>
+                  <a:srgbClr val="22282E"/>
+                </a:solidFill>
+              </a:rPr>
+              <a:t>•  Construye el threat model: en una tabla, lista activos, entradas por capa, amenazas y prioridad de prueba.</a:t>
             </a:r>
           </a:p>
         </p:txBody>
@@ -3347,7 +3381,7 @@
                   <a:srgbClr val="0B3D2E"/>
                 </a:solidFill>
               </a:rPr>
-              <a:t>❓ Preguntas frecuentes</a:t>
+              <a:t>✍️ Ejercicios</a:t>
             </a:r>
           </a:p>
         </p:txBody>
@@ -3385,82 +3419,82 @@
                   <a:srgbClr val="22282E"/>
                 </a:solidFill>
               </a:rPr>
-              <a:t>•  ❓ ¿Por dónde empiezo a auditar un dispositivo IoT?</a:t>
-            </a:r>
-          </a:p>
-          <a:p>
-            <a:pPr>
-              <a:spcAft>
-                <a:spcPts val="600"/>
-              </a:spcAft>
-            </a:pPr>
-            <a:r>
-              <a:rPr sz="1500">
-                <a:solidFill>
-                  <a:srgbClr val="22282E"/>
-                </a:solidFill>
-              </a:rPr>
-              <a:t>•  Por el modelado de la superficie: enumera red, revisa la app y las APIs. Suelen ser el camino más rápido antes de abrir el hardware.</a:t>
-            </a:r>
-          </a:p>
-          <a:p>
-            <a:pPr>
-              <a:spcAft>
-                <a:spcPts val="600"/>
-              </a:spcAft>
-            </a:pPr>
-            <a:r>
-              <a:rPr sz="1500">
-                <a:solidFill>
-                  <a:srgbClr val="22282E"/>
-                </a:solidFill>
-              </a:rPr>
-              <a:t>•  ❓ ¿Por qué el IoT es tan inseguro históricamente?</a:t>
-            </a:r>
-          </a:p>
-          <a:p>
-            <a:pPr>
-              <a:spcAft>
-                <a:spcPts val="600"/>
-              </a:spcAft>
-            </a:pPr>
-            <a:r>
-              <a:rPr sz="1500">
-                <a:solidFill>
-                  <a:srgbClr val="22282E"/>
-                </a:solidFill>
-              </a:rPr>
-              <a:t>•  Costes bajos, ciclos de desarrollo cortos, falta de actualizaciones, credenciales por defecto y reutilización de firmware sin endurecer.</a:t>
-            </a:r>
-          </a:p>
-          <a:p>
-            <a:pPr>
-              <a:spcAft>
-                <a:spcPts val="600"/>
-              </a:spcAft>
-            </a:pPr>
-            <a:r>
-              <a:rPr sz="1500">
-                <a:solidFill>
-                  <a:srgbClr val="22282E"/>
-                </a:solidFill>
-              </a:rPr>
-              <a:t>•  ❓ ¿Necesito abrir el dispositivo desde el principio?</a:t>
-            </a:r>
-          </a:p>
-          <a:p>
-            <a:pPr>
-              <a:spcAft>
-                <a:spcPts val="600"/>
-              </a:spcAft>
-            </a:pPr>
-            <a:r>
-              <a:rPr sz="1500">
-                <a:solidFill>
-                  <a:srgbClr val="22282E"/>
-                </a:solidFill>
-              </a:rPr>
-              <a:t>•  No siempre. El análisis de red, app y nube da mucho valor sin tocar el hardware; el análisis físico se reserva para profundizar (clases 267–268).</a:t>
+              <a:t>•  Dibuja el diagrama de las cinco capas de tu dispositivo IoT y anota un riesgo por capa.</a:t>
+            </a:r>
+          </a:p>
+          <a:p>
+            <a:pPr>
+              <a:spcAft>
+                <a:spcPts val="600"/>
+              </a:spcAft>
+            </a:pPr>
+            <a:r>
+              <a:rPr sz="1500">
+                <a:solidFill>
+                  <a:srgbClr val="22282E"/>
+                </a:solidFill>
+              </a:rPr>
+              <a:t>•  Mapea tres hallazgos potenciales al OWASP IoT Top 10.</a:t>
+            </a:r>
+          </a:p>
+          <a:p>
+            <a:pPr>
+              <a:spcAft>
+                <a:spcPts val="600"/>
+              </a:spcAft>
+            </a:pPr>
+            <a:r>
+              <a:rPr sz="1500">
+                <a:solidFill>
+                  <a:srgbClr val="22282E"/>
+                </a:solidFill>
+              </a:rPr>
+              <a:t>•  Enumera con Nmap los servicios de un dispositivo propio y clasifícalos por riesgo.</a:t>
+            </a:r>
+          </a:p>
+          <a:p>
+            <a:pPr>
+              <a:spcAft>
+                <a:spcPts val="600"/>
+              </a:spcAft>
+            </a:pPr>
+            <a:r>
+              <a:rPr sz="1500">
+                <a:solidFill>
+                  <a:srgbClr val="22282E"/>
+                </a:solidFill>
+              </a:rPr>
+              <a:t>•  Identifica en el tráfico si el dispositivo usa TLS o texto claro para hablar con la nube.</a:t>
+            </a:r>
+          </a:p>
+          <a:p>
+            <a:pPr>
+              <a:spcAft>
+                <a:spcPts val="600"/>
+              </a:spcAft>
+            </a:pPr>
+            <a:r>
+              <a:rPr sz="1500">
+                <a:solidFill>
+                  <a:srgbClr val="22282E"/>
+                </a:solidFill>
+              </a:rPr>
+              <a:t>•  Investiga si el modelo tiene credenciales por defecto documentadas públicamente.</a:t>
+            </a:r>
+          </a:p>
+          <a:p>
+            <a:pPr>
+              <a:spcAft>
+                <a:spcPts val="600"/>
+              </a:spcAft>
+            </a:pPr>
+            <a:r>
+              <a:rPr sz="1500">
+                <a:solidFill>
+                  <a:srgbClr val="22282E"/>
+                </a:solidFill>
+              </a:rPr>
+              <a:t>•  Redacta un threat model de una página para el dispositivo.</a:t>
             </a:r>
           </a:p>
         </p:txBody>
@@ -3511,7 +3545,7 @@
                   <a:srgbClr val="0B3D2E"/>
                 </a:solidFill>
               </a:rPr>
-              <a:t>🔗 Referencias</a:t>
+              <a:t>📝 Reto verificable</a:t>
             </a:r>
           </a:p>
         </p:txBody>
@@ -3549,6 +3583,408 @@
                   <a:srgbClr val="22282E"/>
                 </a:solidFill>
               </a:rPr>
+              <a:t>•  Elabora un mapa de superficie de ataque de un dispositivo IoT propio que cubra las cinco capas y un plan de evaluación priorizado. Criterio de aceptación: el plan identifica al menos un servicio de…</a:t>
+            </a:r>
+          </a:p>
+        </p:txBody>
+      </p:sp>
+    </p:spTree>
+  </p:cSld>
+  <p:clrMapOvr>
+    <a:masterClrMapping/>
+  </p:clrMapOvr>
+</p:sld>
+</file>
+
+<file path=ppt/slides/slide13.xml><?xml version="1.0" encoding="utf-8"?>
+<p:sld xmlns:a="http://schemas.openxmlformats.org/drawingml/2006/main" xmlns:p="http://schemas.openxmlformats.org/presentationml/2006/main" xmlns:r="http://schemas.openxmlformats.org/officeDocument/2006/relationships">
+  <p:cSld>
+    <p:spTree>
+      <p:nvGrpSpPr>
+        <p:cNvPr id="1" name=""/>
+        <p:cNvGrpSpPr/>
+        <p:nvPr/>
+      </p:nvGrpSpPr>
+      <p:grpSpPr/>
+      <p:sp>
+        <p:nvSpPr>
+          <p:cNvPr id="2" name="TextBox 1"/>
+          <p:cNvSpPr txBox="1"/>
+          <p:nvPr/>
+        </p:nvSpPr>
+        <p:spPr>
+          <a:xfrm>
+            <a:off x="457200" y="320040"/>
+            <a:ext cx="8229600" cy="822960"/>
+          </a:xfrm>
+          <a:prstGeom prst="rect">
+            <a:avLst/>
+          </a:prstGeom>
+          <a:noFill/>
+        </p:spPr>
+        <p:txBody>
+          <a:bodyPr wrap="square">
+            <a:spAutoFit/>
+          </a:bodyPr>
+          <a:lstStyle/>
+          <a:p>
+            <a:r>
+              <a:rPr sz="2600" b="1">
+                <a:solidFill>
+                  <a:srgbClr val="0B3D2E"/>
+                </a:solidFill>
+              </a:rPr>
+              <a:t>⚠️ Errores comunes</a:t>
+            </a:r>
+          </a:p>
+        </p:txBody>
+      </p:sp>
+      <p:sp>
+        <p:nvSpPr>
+          <p:cNvPr id="3" name="TextBox 2"/>
+          <p:cNvSpPr txBox="1"/>
+          <p:nvPr/>
+        </p:nvSpPr>
+        <p:spPr>
+          <a:xfrm>
+            <a:off x="457200" y="1280160"/>
+            <a:ext cx="8229600" cy="4937760"/>
+          </a:xfrm>
+          <a:prstGeom prst="rect">
+            <a:avLst/>
+          </a:prstGeom>
+          <a:noFill/>
+        </p:spPr>
+        <p:txBody>
+          <a:bodyPr wrap="square">
+            <a:spAutoFit/>
+          </a:bodyPr>
+          <a:lstStyle/>
+          <a:p>
+            <a:pPr>
+              <a:spcAft>
+                <a:spcPts val="600"/>
+              </a:spcAft>
+            </a:pPr>
+            <a:r>
+              <a:rPr sz="1500">
+                <a:solidFill>
+                  <a:srgbClr val="22282E"/>
+                </a:solidFill>
+              </a:rPr>
+              <a:t>•  Nmap no encuentra el dispositivo — Aislamiento de red o firewall; verifica la VLAN y usa -sn</a:t>
+            </a:r>
+          </a:p>
+          <a:p>
+            <a:pPr>
+              <a:spcAft>
+                <a:spcPts val="600"/>
+              </a:spcAft>
+            </a:pPr>
+            <a:r>
+              <a:rPr sz="1500">
+                <a:solidFill>
+                  <a:srgbClr val="22282E"/>
+                </a:solidFill>
+              </a:rPr>
+              <a:t>•  Tráfico a la nube ilegible — Va por TLS; intercéptalo desde la app con proxy y CA propio</a:t>
+            </a:r>
+          </a:p>
+          <a:p>
+            <a:pPr>
+              <a:spcAft>
+                <a:spcPts val="600"/>
+              </a:spcAft>
+            </a:pPr>
+            <a:r>
+              <a:rPr sz="1500">
+                <a:solidFill>
+                  <a:srgbClr val="22282E"/>
+                </a:solidFill>
+              </a:rPr>
+              <a:t>•  El dispositivo deja de funcionar — Escaneo agresivo lo bloqueó; reduce la intensidad (-T2)</a:t>
+            </a:r>
+          </a:p>
+          <a:p>
+            <a:pPr>
+              <a:spcAft>
+                <a:spcPts val="600"/>
+              </a:spcAft>
+            </a:pPr>
+            <a:r>
+              <a:rPr sz="1500">
+                <a:solidFill>
+                  <a:srgbClr val="22282E"/>
+                </a:solidFill>
+              </a:rPr>
+              <a:t>•  No hay puertos abiertos — Solo se comunica saliente a la nube; céntrate en app/API</a:t>
+            </a:r>
+          </a:p>
+          <a:p>
+            <a:pPr>
+              <a:spcAft>
+                <a:spcPts val="600"/>
+              </a:spcAft>
+            </a:pPr>
+            <a:r>
+              <a:rPr sz="1500">
+                <a:solidFill>
+                  <a:srgbClr val="22282E"/>
+                </a:solidFill>
+              </a:rPr>
+              <a:t>•  Emparejamiento falla en laboratorio — Requiere Internet; permite salida controlada y monitorízala</a:t>
+            </a:r>
+          </a:p>
+        </p:txBody>
+      </p:sp>
+    </p:spTree>
+  </p:cSld>
+  <p:clrMapOvr>
+    <a:masterClrMapping/>
+  </p:clrMapOvr>
+</p:sld>
+</file>
+
+<file path=ppt/slides/slide14.xml><?xml version="1.0" encoding="utf-8"?>
+<p:sld xmlns:a="http://schemas.openxmlformats.org/drawingml/2006/main" xmlns:p="http://schemas.openxmlformats.org/presentationml/2006/main" xmlns:r="http://schemas.openxmlformats.org/officeDocument/2006/relationships">
+  <p:cSld>
+    <p:spTree>
+      <p:nvGrpSpPr>
+        <p:cNvPr id="1" name=""/>
+        <p:cNvGrpSpPr/>
+        <p:nvPr/>
+      </p:nvGrpSpPr>
+      <p:grpSpPr/>
+      <p:sp>
+        <p:nvSpPr>
+          <p:cNvPr id="2" name="TextBox 1"/>
+          <p:cNvSpPr txBox="1"/>
+          <p:nvPr/>
+        </p:nvSpPr>
+        <p:spPr>
+          <a:xfrm>
+            <a:off x="457200" y="320040"/>
+            <a:ext cx="8229600" cy="822960"/>
+          </a:xfrm>
+          <a:prstGeom prst="rect">
+            <a:avLst/>
+          </a:prstGeom>
+          <a:noFill/>
+        </p:spPr>
+        <p:txBody>
+          <a:bodyPr wrap="square">
+            <a:spAutoFit/>
+          </a:bodyPr>
+          <a:lstStyle/>
+          <a:p>
+            <a:r>
+              <a:rPr sz="2600" b="1">
+                <a:solidFill>
+                  <a:srgbClr val="0B3D2E"/>
+                </a:solidFill>
+              </a:rPr>
+              <a:t>❓ Preguntas frecuentes</a:t>
+            </a:r>
+          </a:p>
+        </p:txBody>
+      </p:sp>
+      <p:sp>
+        <p:nvSpPr>
+          <p:cNvPr id="3" name="TextBox 2"/>
+          <p:cNvSpPr txBox="1"/>
+          <p:nvPr/>
+        </p:nvSpPr>
+        <p:spPr>
+          <a:xfrm>
+            <a:off x="457200" y="1280160"/>
+            <a:ext cx="8229600" cy="4937760"/>
+          </a:xfrm>
+          <a:prstGeom prst="rect">
+            <a:avLst/>
+          </a:prstGeom>
+          <a:noFill/>
+        </p:spPr>
+        <p:txBody>
+          <a:bodyPr wrap="square">
+            <a:spAutoFit/>
+          </a:bodyPr>
+          <a:lstStyle/>
+          <a:p>
+            <a:pPr>
+              <a:spcAft>
+                <a:spcPts val="600"/>
+              </a:spcAft>
+            </a:pPr>
+            <a:r>
+              <a:rPr sz="1500">
+                <a:solidFill>
+                  <a:srgbClr val="22282E"/>
+                </a:solidFill>
+              </a:rPr>
+              <a:t>•  ❓ ¿Por dónde empiezo a auditar un dispositivo IoT?</a:t>
+            </a:r>
+          </a:p>
+          <a:p>
+            <a:pPr>
+              <a:spcAft>
+                <a:spcPts val="600"/>
+              </a:spcAft>
+            </a:pPr>
+            <a:r>
+              <a:rPr sz="1500">
+                <a:solidFill>
+                  <a:srgbClr val="22282E"/>
+                </a:solidFill>
+              </a:rPr>
+              <a:t>•  Por el modelado de la superficie: enumera red, revisa la app y las APIs. Suelen ser el camino más rápido antes de abrir el hardware.</a:t>
+            </a:r>
+          </a:p>
+          <a:p>
+            <a:pPr>
+              <a:spcAft>
+                <a:spcPts val="600"/>
+              </a:spcAft>
+            </a:pPr>
+            <a:r>
+              <a:rPr sz="1500">
+                <a:solidFill>
+                  <a:srgbClr val="22282E"/>
+                </a:solidFill>
+              </a:rPr>
+              <a:t>•  ❓ ¿Por qué el IoT es tan inseguro históricamente?</a:t>
+            </a:r>
+          </a:p>
+          <a:p>
+            <a:pPr>
+              <a:spcAft>
+                <a:spcPts val="600"/>
+              </a:spcAft>
+            </a:pPr>
+            <a:r>
+              <a:rPr sz="1500">
+                <a:solidFill>
+                  <a:srgbClr val="22282E"/>
+                </a:solidFill>
+              </a:rPr>
+              <a:t>•  Costes bajos, ciclos de desarrollo cortos, falta de actualizaciones, credenciales por defecto y reutilización de firmware sin endurecer.</a:t>
+            </a:r>
+          </a:p>
+          <a:p>
+            <a:pPr>
+              <a:spcAft>
+                <a:spcPts val="600"/>
+              </a:spcAft>
+            </a:pPr>
+            <a:r>
+              <a:rPr sz="1500">
+                <a:solidFill>
+                  <a:srgbClr val="22282E"/>
+                </a:solidFill>
+              </a:rPr>
+              <a:t>•  ❓ ¿Necesito abrir el dispositivo desde el principio?</a:t>
+            </a:r>
+          </a:p>
+          <a:p>
+            <a:pPr>
+              <a:spcAft>
+                <a:spcPts val="600"/>
+              </a:spcAft>
+            </a:pPr>
+            <a:r>
+              <a:rPr sz="1500">
+                <a:solidFill>
+                  <a:srgbClr val="22282E"/>
+                </a:solidFill>
+              </a:rPr>
+              <a:t>•  No siempre. El análisis de red, app y nube da mucho valor sin tocar el hardware; el análisis físico se reserva para profundizar (clases 267–268).</a:t>
+            </a:r>
+          </a:p>
+        </p:txBody>
+      </p:sp>
+    </p:spTree>
+  </p:cSld>
+  <p:clrMapOvr>
+    <a:masterClrMapping/>
+  </p:clrMapOvr>
+</p:sld>
+</file>
+
+<file path=ppt/slides/slide15.xml><?xml version="1.0" encoding="utf-8"?>
+<p:sld xmlns:a="http://schemas.openxmlformats.org/drawingml/2006/main" xmlns:p="http://schemas.openxmlformats.org/presentationml/2006/main" xmlns:r="http://schemas.openxmlformats.org/officeDocument/2006/relationships">
+  <p:cSld>
+    <p:spTree>
+      <p:nvGrpSpPr>
+        <p:cNvPr id="1" name=""/>
+        <p:cNvGrpSpPr/>
+        <p:nvPr/>
+      </p:nvGrpSpPr>
+      <p:grpSpPr/>
+      <p:sp>
+        <p:nvSpPr>
+          <p:cNvPr id="2" name="TextBox 1"/>
+          <p:cNvSpPr txBox="1"/>
+          <p:nvPr/>
+        </p:nvSpPr>
+        <p:spPr>
+          <a:xfrm>
+            <a:off x="457200" y="320040"/>
+            <a:ext cx="8229600" cy="822960"/>
+          </a:xfrm>
+          <a:prstGeom prst="rect">
+            <a:avLst/>
+          </a:prstGeom>
+          <a:noFill/>
+        </p:spPr>
+        <p:txBody>
+          <a:bodyPr wrap="square">
+            <a:spAutoFit/>
+          </a:bodyPr>
+          <a:lstStyle/>
+          <a:p>
+            <a:r>
+              <a:rPr sz="2600" b="1">
+                <a:solidFill>
+                  <a:srgbClr val="0B3D2E"/>
+                </a:solidFill>
+              </a:rPr>
+              <a:t>🔗 Referencias</a:t>
+            </a:r>
+          </a:p>
+        </p:txBody>
+      </p:sp>
+      <p:sp>
+        <p:nvSpPr>
+          <p:cNvPr id="3" name="TextBox 2"/>
+          <p:cNvSpPr txBox="1"/>
+          <p:nvPr/>
+        </p:nvSpPr>
+        <p:spPr>
+          <a:xfrm>
+            <a:off x="457200" y="1280160"/>
+            <a:ext cx="8229600" cy="4937760"/>
+          </a:xfrm>
+          <a:prstGeom prst="rect">
+            <a:avLst/>
+          </a:prstGeom>
+          <a:noFill/>
+        </p:spPr>
+        <p:txBody>
+          <a:bodyPr wrap="square">
+            <a:spAutoFit/>
+          </a:bodyPr>
+          <a:lstStyle/>
+          <a:p>
+            <a:pPr>
+              <a:spcAft>
+                <a:spcPts val="600"/>
+              </a:spcAft>
+            </a:pPr>
+            <a:r>
+              <a:rPr sz="1500">
+                <a:solidFill>
+                  <a:srgbClr val="22282E"/>
+                </a:solidFill>
+              </a:rPr>
               <a:t>•  OWASP IoT Top 10: &lt;https://owasp.org/www-project-internet-of-things/&gt;</a:t>
             </a:r>
           </a:p>
@@ -3594,11 +4030,86 @@
                   <a:srgbClr val="22282E"/>
                 </a:solidFill>
               </a:rPr>
-              <a:t>•  NIST IR 8259 — Foundational Cybersecurity Activities for IoT: &lt;https://csrc.nist.gov/pubs/ir/8259/final&gt;</a:t>
-            </a:r>
-          </a:p>
-        </p:txBody>
-      </p:sp>
+              <a:t>•  NIST IR 8259 Rev. 1 — Foundational Cybersecurity Activities for IoT Product Manufacturers: &lt;https://csrc.nist.gov/pubs/ir/8259/r1/final&gt;</a:t>
+            </a:r>
+          </a:p>
+        </p:txBody>
+      </p:sp>
+    </p:spTree>
+  </p:cSld>
+  <p:clrMapOvr>
+    <a:masterClrMapping/>
+  </p:clrMapOvr>
+</p:sld>
+</file>
+
+<file path=ppt/slides/slide16.xml><?xml version="1.0" encoding="utf-8"?>
+<p:sld xmlns:a="http://schemas.openxmlformats.org/drawingml/2006/main" xmlns:p="http://schemas.openxmlformats.org/presentationml/2006/main" xmlns:r="http://schemas.openxmlformats.org/officeDocument/2006/relationships">
+  <p:cSld>
+    <p:spTree>
+      <p:nvGrpSpPr>
+        <p:cNvPr id="1" name=""/>
+        <p:cNvGrpSpPr/>
+        <p:nvPr/>
+      </p:nvGrpSpPr>
+      <p:grpSpPr/>
+      <p:sp>
+        <p:nvSpPr>
+          <p:cNvPr id="2" name="TextBox 1"/>
+          <p:cNvSpPr txBox="1"/>
+          <p:nvPr/>
+        </p:nvSpPr>
+        <p:spPr>
+          <a:xfrm>
+            <a:off x="457200" y="274320"/>
+            <a:ext cx="8229600" cy="640080"/>
+          </a:xfrm>
+          <a:prstGeom prst="rect">
+            <a:avLst/>
+          </a:prstGeom>
+          <a:noFill/>
+        </p:spPr>
+        <p:txBody>
+          <a:bodyPr wrap="square">
+            <a:spAutoFit/>
+          </a:bodyPr>
+          <a:lstStyle/>
+          <a:p>
+            <a:r>
+              <a:rPr sz="2200" b="1">
+                <a:solidFill>
+                  <a:srgbClr val="0B3D2E"/>
+                </a:solidFill>
+              </a:rPr>
+              <a:t>Diagrama de la clase</a:t>
+            </a:r>
+          </a:p>
+        </p:txBody>
+      </p:sp>
+      <p:pic>
+        <p:nvPicPr>
+          <p:cNvPr id="3" name="Picture 2" descr="e65d389ca6ef3aa8.png"/>
+          <p:cNvPicPr>
+            <a:picLocks noChangeAspect="1"/>
+          </p:cNvPicPr>
+          <p:nvPr/>
+        </p:nvPicPr>
+        <p:blipFill>
+          <a:blip r:embed="rId2"/>
+          <a:stretch>
+            <a:fillRect/>
+          </a:stretch>
+        </p:blipFill>
+        <p:spPr>
+          <a:xfrm>
+            <a:off x="2570765" y="1097280"/>
+            <a:ext cx="4002469" cy="5303520"/>
+          </a:xfrm>
+          <a:prstGeom prst="rect">
+            <a:avLst/>
+          </a:prstGeom>
+        </p:spPr>
+      </p:pic>
     </p:spTree>
   </p:cSld>
   <p:clrMapOvr>
@@ -3683,7 +4194,7 @@
                   <a:srgbClr val="22282E"/>
                 </a:solidFill>
               </a:rPr>
-              <a:t>•  Construir un modelo mental completo de la superficie de ataque de un dispositivo IoT: aplicación móvil, API/nube, comunicaciones de red, firmware y hardware físico. El alumno aprenderá a mapear metódicamente esas capas, a aplicar el OWASP IoT Top 10 y a planificar una evaluación de seguridad de un dispositivo conectado propio, sentando las bases para las clases prácticas de firmware, hardware y radio que siguen.</a:t>
+              <a:t>•  Construir un modelo mental completo de la superficie de ataque de un dispositivo IoT: aplicación móvil, API/nube, comunicaciones de red, firmware y hardware físico. El alumno aprenderá a mapear…</a:t>
             </a:r>
           </a:p>
         </p:txBody>
@@ -4092,7 +4603,7 @@
                   <a:srgbClr val="0B3D2E"/>
                 </a:solidFill>
               </a:rPr>
-              <a:t>📖 Definiciones y características</a:t>
+              <a:t>🧠 Explicación en profundidad</a:t>
             </a:r>
           </a:p>
         </p:txBody>
@@ -4130,82 +4641,52 @@
                   <a:srgbClr val="22282E"/>
                 </a:solidFill>
               </a:rPr>
-              <a:t>•  Superficie de ataque IoT: conjunto de todos los puntos de entrada del sistema (app, API, radio, puertos, interfaces físicas). Característica: es multicapa y a menudo se pivota entre capas.</a:t>
-            </a:r>
-          </a:p>
-          <a:p>
-            <a:pPr>
-              <a:spcAft>
-                <a:spcPts val="600"/>
-              </a:spcAft>
-            </a:pPr>
-            <a:r>
-              <a:rPr sz="1500">
-                <a:solidFill>
-                  <a:srgbClr val="22282E"/>
-                </a:solidFill>
-              </a:rPr>
-              <a:t>•  OWASP IoT Top 10: lista de los diez riesgos más críticos en IoT (credenciales débiles, servicios inseguros, interfaces inseguras, falta de actualización, etc.). Característica: guía de priorización.</a:t>
-            </a:r>
-          </a:p>
-          <a:p>
-            <a:pPr>
-              <a:spcAft>
-                <a:spcPts val="600"/>
-              </a:spcAft>
-            </a:pPr>
-            <a:r>
-              <a:rPr sz="1500">
-                <a:solidFill>
-                  <a:srgbClr val="22282E"/>
-                </a:solidFill>
-              </a:rPr>
-              <a:t>•  MQTT/CoAP: protocolos de mensajería ligeros habituales en IoT. Característica: frecuentemente sin autenticación ni cifrado por defecto.</a:t>
-            </a:r>
-          </a:p>
-          <a:p>
-            <a:pPr>
-              <a:spcAft>
-                <a:spcPts val="600"/>
-              </a:spcAft>
-            </a:pPr>
-            <a:r>
-              <a:rPr sz="1500">
-                <a:solidFill>
-                  <a:srgbClr val="22282E"/>
-                </a:solidFill>
-              </a:rPr>
-              <a:t>•  Threat model: representación estructurada de activos, amenazas y vectores. Característica: dirige el pentest hacia lo que más importa.</a:t>
-            </a:r>
-          </a:p>
-          <a:p>
-            <a:pPr>
-              <a:spcAft>
-                <a:spcPts val="600"/>
-              </a:spcAft>
-            </a:pPr>
-            <a:r>
-              <a:rPr sz="1500">
-                <a:solidFill>
-                  <a:srgbClr val="22282E"/>
-                </a:solidFill>
-              </a:rPr>
-              <a:t>•  Hardcoded credentials: credenciales embebidas en el firmware o la app. Característica: comprometen todos los dispositivos del mismo modelo.</a:t>
-            </a:r>
-          </a:p>
-          <a:p>
-            <a:pPr>
-              <a:spcAft>
-                <a:spcPts val="600"/>
-              </a:spcAft>
-            </a:pPr>
-            <a:r>
-              <a:rPr sz="1500">
-                <a:solidFill>
-                  <a:srgbClr val="22282E"/>
-                </a:solidFill>
-              </a:rPr>
-              <a:t>•  OTA (Over-The-Air) update: mecanismo de actualización remota del firmware. Característica: si no está firmado, permite instalar firmware malicioso.</a:t>
+              <a:t>•  Un producto conectado combina dispositivo, aplicación móvil, servicio cloud, identidad, red local, actualización y soporte. Una cerradura puede proteger bien su radio y exponer cuentas en la API; una…</a:t>
+            </a:r>
+          </a:p>
+          <a:p>
+            <a:pPr>
+              <a:spcAft>
+                <a:spcPts val="600"/>
+              </a:spcAft>
+            </a:pPr>
+            <a:r>
+              <a:rPr sz="1500">
+                <a:solidFill>
+                  <a:srgbClr val="22282E"/>
+                </a:solidFill>
+              </a:rPr>
+              <a:t>•  NIST IR 8259A define una base de capacidades técnicas: identificación, configuración, protección de datos, control de interfaces, actualización, conocimiento del estado y seguridad del dispositivo.…</a:t>
+            </a:r>
+          </a:p>
+          <a:p>
+            <a:pPr>
+              <a:spcAft>
+                <a:spcPts val="600"/>
+              </a:spcAft>
+            </a:pPr>
+            <a:r>
+              <a:rPr sz="1500">
+                <a:solidFill>
+                  <a:srgbClr val="22282E"/>
+                </a:solidFill>
+              </a:rPr>
+              <a:t>•  La amenaza física cambia supuestos: el atacante puede abrir carcasa, cortar energía o leer flash. La respuesta no siempre es hacer todo inviolable, sino proteger claves, detectar manipulación cuando…</a:t>
+            </a:r>
+          </a:p>
+          <a:p>
+            <a:pPr>
+              <a:spcAft>
+                <a:spcPts val="600"/>
+              </a:spcAft>
+            </a:pPr>
+            <a:r>
+              <a:rPr sz="1500">
+                <a:solidFill>
+                  <a:srgbClr val="22282E"/>
+                </a:solidFill>
+              </a:rPr>
+              <a:t>•  Un sensor recibe firmware firmado, pero su app usa una API sin separación entre hogares. El control de actualización no cubre autorización cloud. El inventario por capas descubre ambos propietarios y…</a:t>
             </a:r>
           </a:p>
         </p:txBody>
@@ -4256,7 +4737,7 @@
                   <a:srgbClr val="0B3D2E"/>
                 </a:solidFill>
               </a:rPr>
-              <a:t>🧰 Herramientas y preparación</a:t>
+              <a:t>📔 Glosario operativo</a:t>
             </a:r>
           </a:p>
         </p:txBody>
@@ -4294,97 +4775,82 @@
                   <a:srgbClr val="22282E"/>
                 </a:solidFill>
               </a:rPr>
-              <a:t>•  Dispositivo IoT propio de bajo costo (cámara, enchufe, bombilla inteligente) para laboratorio.</a:t>
-            </a:r>
-          </a:p>
-          <a:p>
-            <a:pPr>
-              <a:spcAft>
-                <a:spcPts val="600"/>
-              </a:spcAft>
-            </a:pPr>
-            <a:r>
-              <a:rPr sz="1500">
-                <a:solidFill>
-                  <a:srgbClr val="22282E"/>
-                </a:solidFill>
-              </a:rPr>
-              <a:t>•  Nmap, Wireshark, netcat para enumeración de red.</a:t>
-            </a:r>
-          </a:p>
-          <a:p>
-            <a:pPr>
-              <a:spcAft>
-                <a:spcPts val="600"/>
-              </a:spcAft>
-            </a:pPr>
-            <a:r>
-              <a:rPr sz="1500">
-                <a:solidFill>
-                  <a:srgbClr val="22282E"/>
-                </a:solidFill>
-              </a:rPr>
-              <a:t>•  Router/AP de laboratorio aislado o VLAN dedicada para contener el dispositivo.</a:t>
-            </a:r>
-          </a:p>
-          <a:p>
-            <a:pPr>
-              <a:spcAft>
-                <a:spcPts val="600"/>
-              </a:spcAft>
-            </a:pPr>
-            <a:r>
-              <a:rPr sz="1500">
-                <a:solidFill>
-                  <a:srgbClr val="22282E"/>
-                </a:solidFill>
-              </a:rPr>
-              <a:t>•  Burp Suite/mitmproxy para inspeccionar el tráfico app↔nube.</a:t>
-            </a:r>
-          </a:p>
-          <a:p>
-            <a:pPr>
-              <a:spcAft>
-                <a:spcPts val="600"/>
-              </a:spcAft>
-            </a:pPr>
-            <a:r>
-              <a:rPr sz="1500">
-                <a:solidFill>
-                  <a:srgbClr val="22282E"/>
-                </a:solidFill>
-              </a:rPr>
-              <a:t>•  nmap -sn 192.168.50.0/24                     # host discovery</a:t>
-            </a:r>
-          </a:p>
-          <a:p>
-            <a:pPr>
-              <a:spcAft>
-                <a:spcPts val="600"/>
-              </a:spcAft>
-            </a:pPr>
-            <a:r>
-              <a:rPr sz="1500">
-                <a:solidFill>
-                  <a:srgbClr val="22282E"/>
-                </a:solidFill>
-              </a:rPr>
-              <a:t>•  nmap -sV -p- 192.168.50.23                   # servicios y versiones</a:t>
-            </a:r>
-          </a:p>
-          <a:p>
-            <a:pPr>
-              <a:spcAft>
-                <a:spcPts val="600"/>
-              </a:spcAft>
-            </a:pPr>
-            <a:r>
-              <a:rPr sz="1500">
-                <a:solidFill>
-                  <a:srgbClr val="22282E"/>
-                </a:solidFill>
-              </a:rPr>
-              <a:t>•  tcpdump -i wlan0 host 192.168.50.23 -w iot.pcap</a:t>
+              <a:t>•  Término — Definición útil</a:t>
+            </a:r>
+          </a:p>
+          <a:p>
+            <a:pPr>
+              <a:spcAft>
+                <a:spcPts val="600"/>
+              </a:spcAft>
+            </a:pPr>
+            <a:r>
+              <a:rPr sz="1500">
+                <a:solidFill>
+                  <a:srgbClr val="22282E"/>
+                </a:solidFill>
+              </a:rPr>
+              <a:t>•  Producto IoT — Dispositivo y servicios necesarios para su función.</a:t>
+            </a:r>
+          </a:p>
+          <a:p>
+            <a:pPr>
+              <a:spcAft>
+                <a:spcPts val="600"/>
+              </a:spcAft>
+            </a:pPr>
+            <a:r>
+              <a:rPr sz="1500">
+                <a:solidFill>
+                  <a:srgbClr val="22282E"/>
+                </a:solidFill>
+              </a:rPr>
+              <a:t>•  Capability baseline — Conjunto adaptable de capacidades, no lista de aprobación.</a:t>
+            </a:r>
+          </a:p>
+          <a:p>
+            <a:pPr>
+              <a:spcAft>
+                <a:spcPts val="600"/>
+              </a:spcAft>
+            </a:pPr>
+            <a:r>
+              <a:rPr sz="1500">
+                <a:solidFill>
+                  <a:srgbClr val="22282E"/>
+                </a:solidFill>
+              </a:rPr>
+              <a:t>•  Provisioning — Incorporación inicial de identidad, claves y configuración.</a:t>
+            </a:r>
+          </a:p>
+          <a:p>
+            <a:pPr>
+              <a:spcAft>
+                <a:spcPts val="600"/>
+              </a:spcAft>
+            </a:pPr>
+            <a:r>
+              <a:rPr sz="1500">
+                <a:solidFill>
+                  <a:srgbClr val="22282E"/>
+                </a:solidFill>
+              </a:rPr>
+              <a:t>•  Fin de vida — Momento y proceso en que cesa soporte y se gestiona retiro.</a:t>
+            </a:r>
+          </a:p>
+          <a:p>
+            <a:pPr>
+              <a:spcAft>
+                <a:spcPts val="600"/>
+              </a:spcAft>
+            </a:pPr>
+            <a:r>
+              <a:rPr sz="1500">
+                <a:solidFill>
+                  <a:srgbClr val="22282E"/>
+                </a:solidFill>
+              </a:rPr>
+              <a:t>•  Efecto físico — Cambio sobre entorno o seguridad causado por el producto.</a:t>
             </a:r>
           </a:p>
         </p:txBody>
@@ -4435,7 +4901,7 @@
                   <a:srgbClr val="0B3D2E"/>
                 </a:solidFill>
               </a:rPr>
-              <a:t>🧪 Laboratorio guiado</a:t>
+              <a:t>✅ Criterio de dominio</a:t>
             </a:r>
           </a:p>
         </p:txBody>
@@ -4473,97 +4939,7 @@
                   <a:srgbClr val="22282E"/>
                 </a:solidFill>
               </a:rPr>
-              <a:t>•  Aísla el dispositivo: conéctalo a una red/VLAN de laboratorio sin acceso a tu red principal.</a:t>
-            </a:r>
-          </a:p>
-          <a:p>
-            <a:pPr>
-              <a:spcAft>
-                <a:spcPts val="600"/>
-              </a:spcAft>
-            </a:pPr>
-            <a:r>
-              <a:rPr sz="1500">
-                <a:solidFill>
-                  <a:srgbClr val="22282E"/>
-                </a:solidFill>
-              </a:rPr>
-              <a:t>•  Descubre y enumera: con Nmap identifica IP, puertos abiertos y servicios (Telnet, HTTP, RTSP, UPnP, MQTT).</a:t>
-            </a:r>
-          </a:p>
-          <a:p>
-            <a:pPr>
-              <a:spcAft>
-                <a:spcPts val="600"/>
-              </a:spcAft>
-            </a:pPr>
-            <a:r>
-              <a:rPr sz="1500">
-                <a:solidFill>
-                  <a:srgbClr val="22282E"/>
-                </a:solidFill>
-              </a:rPr>
-              <a:t>•  Captura tráfico: usa tcpdump/Wireshark durante el emparejamiento y el uso normal; identifica protocolos y destinos en la nube.</a:t>
-            </a:r>
-          </a:p>
-          <a:p>
-            <a:pPr>
-              <a:spcAft>
-                <a:spcPts val="600"/>
-              </a:spcAft>
-            </a:pPr>
-            <a:r>
-              <a:rPr sz="1500">
-                <a:solidFill>
-                  <a:srgbClr val="22282E"/>
-                </a:solidFill>
-              </a:rPr>
-              <a:t>•  Analiza la app móvil: aplica lo aprendido en las clases 261–264 para revisar cómo la app se comunica con el dispositivo y la nube.</a:t>
-            </a:r>
-          </a:p>
-          <a:p>
-            <a:pPr>
-              <a:spcAft>
-                <a:spcPts val="600"/>
-              </a:spcAft>
-            </a:pPr>
-            <a:r>
-              <a:rPr sz="1500">
-                <a:solidFill>
-                  <a:srgbClr val="22282E"/>
-                </a:solidFill>
-              </a:rPr>
-              <a:t>•  Prueba las APIs: intercepta con Burp las llamadas a la nube; busca autenticación débil, IDOR o falta de TLS.</a:t>
-            </a:r>
-          </a:p>
-          <a:p>
-            <a:pPr>
-              <a:spcAft>
-                <a:spcPts val="600"/>
-              </a:spcAft>
-            </a:pPr>
-            <a:r>
-              <a:rPr sz="1500">
-                <a:solidFill>
-                  <a:srgbClr val="22282E"/>
-                </a:solidFill>
-              </a:rPr>
-              <a:t>•  Revisa credenciales por defecto: intenta acceso con usuarios/contraseñas típicos documentados del fabricante.</a:t>
-            </a:r>
-          </a:p>
-          <a:p>
-            <a:pPr>
-              <a:spcAft>
-                <a:spcPts val="600"/>
-              </a:spcAft>
-            </a:pPr>
-            <a:r>
-              <a:rPr sz="1500">
-                <a:solidFill>
-                  <a:srgbClr val="22282E"/>
-                </a:solidFill>
-              </a:rPr>
-              <a:t>•  Construye el threat model: en una tabla, lista activos, entradas por capa, amenazas y prioridad de prueba.</a:t>
+              <a:t>•  Existe dominio cuando el alumno dibuja todas las capas y actores, sigue un dato y un comando, adapta la base NIST al impacto y propone soporte, actualización y retiro verificables.</a:t>
             </a:r>
           </a:p>
         </p:txBody>
@@ -4614,7 +4990,7 @@
                   <a:srgbClr val="0B3D2E"/>
                 </a:solidFill>
               </a:rPr>
-              <a:t>✍️ Ejercicios</a:t>
+              <a:t>📖 Definiciones y características</a:t>
             </a:r>
           </a:p>
         </p:txBody>
@@ -4652,82 +5028,82 @@
                   <a:srgbClr val="22282E"/>
                 </a:solidFill>
               </a:rPr>
-              <a:t>•  Dibuja el diagrama de las cinco capas de tu dispositivo IoT y anota un riesgo por capa.</a:t>
-            </a:r>
-          </a:p>
-          <a:p>
-            <a:pPr>
-              <a:spcAft>
-                <a:spcPts val="600"/>
-              </a:spcAft>
-            </a:pPr>
-            <a:r>
-              <a:rPr sz="1500">
-                <a:solidFill>
-                  <a:srgbClr val="22282E"/>
-                </a:solidFill>
-              </a:rPr>
-              <a:t>•  Mapea tres hallazgos potenciales al OWASP IoT Top 10.</a:t>
-            </a:r>
-          </a:p>
-          <a:p>
-            <a:pPr>
-              <a:spcAft>
-                <a:spcPts val="600"/>
-              </a:spcAft>
-            </a:pPr>
-            <a:r>
-              <a:rPr sz="1500">
-                <a:solidFill>
-                  <a:srgbClr val="22282E"/>
-                </a:solidFill>
-              </a:rPr>
-              <a:t>•  Enumera con Nmap los servicios de un dispositivo propio y clasifícalos por riesgo.</a:t>
-            </a:r>
-          </a:p>
-          <a:p>
-            <a:pPr>
-              <a:spcAft>
-                <a:spcPts val="600"/>
-              </a:spcAft>
-            </a:pPr>
-            <a:r>
-              <a:rPr sz="1500">
-                <a:solidFill>
-                  <a:srgbClr val="22282E"/>
-                </a:solidFill>
-              </a:rPr>
-              <a:t>•  Identifica en el tráfico si el dispositivo usa TLS o texto claro para hablar con la nube.</a:t>
-            </a:r>
-          </a:p>
-          <a:p>
-            <a:pPr>
-              <a:spcAft>
-                <a:spcPts val="600"/>
-              </a:spcAft>
-            </a:pPr>
-            <a:r>
-              <a:rPr sz="1500">
-                <a:solidFill>
-                  <a:srgbClr val="22282E"/>
-                </a:solidFill>
-              </a:rPr>
-              <a:t>•  Investiga si el modelo tiene credenciales por defecto documentadas públicamente.</a:t>
-            </a:r>
-          </a:p>
-          <a:p>
-            <a:pPr>
-              <a:spcAft>
-                <a:spcPts val="600"/>
-              </a:spcAft>
-            </a:pPr>
-            <a:r>
-              <a:rPr sz="1500">
-                <a:solidFill>
-                  <a:srgbClr val="22282E"/>
-                </a:solidFill>
-              </a:rPr>
-              <a:t>•  Redacta un threat model de una página para el dispositivo.</a:t>
+              <a:t>•  Superficie de ataque IoT: conjunto de todos los puntos de entrada del sistema (app, API, radio, puertos, interfaces físicas). Característica: es multicapa y a menudo se pivota entre capas.</a:t>
+            </a:r>
+          </a:p>
+          <a:p>
+            <a:pPr>
+              <a:spcAft>
+                <a:spcPts val="600"/>
+              </a:spcAft>
+            </a:pPr>
+            <a:r>
+              <a:rPr sz="1500">
+                <a:solidFill>
+                  <a:srgbClr val="22282E"/>
+                </a:solidFill>
+              </a:rPr>
+              <a:t>•  OWASP IoT Top 10: lista de los diez riesgos más críticos en IoT (credenciales débiles, servicios inseguros, interfaces inseguras, falta de actualización, etc.). Característica: guía de priorización.</a:t>
+            </a:r>
+          </a:p>
+          <a:p>
+            <a:pPr>
+              <a:spcAft>
+                <a:spcPts val="600"/>
+              </a:spcAft>
+            </a:pPr>
+            <a:r>
+              <a:rPr sz="1500">
+                <a:solidFill>
+                  <a:srgbClr val="22282E"/>
+                </a:solidFill>
+              </a:rPr>
+              <a:t>•  MQTT/CoAP: protocolos de mensajería ligeros habituales en IoT. Característica: frecuentemente sin autenticación ni cifrado por defecto.</a:t>
+            </a:r>
+          </a:p>
+          <a:p>
+            <a:pPr>
+              <a:spcAft>
+                <a:spcPts val="600"/>
+              </a:spcAft>
+            </a:pPr>
+            <a:r>
+              <a:rPr sz="1500">
+                <a:solidFill>
+                  <a:srgbClr val="22282E"/>
+                </a:solidFill>
+              </a:rPr>
+              <a:t>•  Threat model: representación estructurada de activos, amenazas y vectores. Característica: dirige el pentest hacia lo que más importa.</a:t>
+            </a:r>
+          </a:p>
+          <a:p>
+            <a:pPr>
+              <a:spcAft>
+                <a:spcPts val="600"/>
+              </a:spcAft>
+            </a:pPr>
+            <a:r>
+              <a:rPr sz="1500">
+                <a:solidFill>
+                  <a:srgbClr val="22282E"/>
+                </a:solidFill>
+              </a:rPr>
+              <a:t>•  Hardcoded credentials: credenciales embebidas en el firmware o la app. Característica: comprometen todos los dispositivos del mismo modelo.</a:t>
+            </a:r>
+          </a:p>
+          <a:p>
+            <a:pPr>
+              <a:spcAft>
+                <a:spcPts val="600"/>
+              </a:spcAft>
+            </a:pPr>
+            <a:r>
+              <a:rPr sz="1500">
+                <a:solidFill>
+                  <a:srgbClr val="22282E"/>
+                </a:solidFill>
+              </a:rPr>
+              <a:t>•  OTA (Over-The-Air) update: mecanismo de actualización remota del firmware. Característica: si no está firmado, permite instalar firmware malicioso.</a:t>
             </a:r>
           </a:p>
         </p:txBody>
@@ -4778,7 +5154,7 @@
                   <a:srgbClr val="0B3D2E"/>
                 </a:solidFill>
               </a:rPr>
-              <a:t>📝 Reto verificable</a:t>
+              <a:t>🧰 Herramientas y preparación</a:t>
             </a:r>
           </a:p>
         </p:txBody>
@@ -4816,7 +5192,52 @@
                   <a:srgbClr val="22282E"/>
                 </a:solidFill>
               </a:rPr>
-              <a:t>•  Elabora un mapa de superficie de ataque de un dispositivo IoT propio que cubra las cinco capas y un plan de evaluación priorizado. Criterio de aceptación: el plan identifica al menos un servicio de red expuesto (con evidencia de Nmap) y determina, con captura de tráfico, si la comunicación con la nube va cifrada o en claro.</a:t>
+              <a:t>•  Dispositivo IoT propio de bajo costo (cámara, enchufe, bombilla inteligente) para laboratorio.</a:t>
+            </a:r>
+          </a:p>
+          <a:p>
+            <a:pPr>
+              <a:spcAft>
+                <a:spcPts val="600"/>
+              </a:spcAft>
+            </a:pPr>
+            <a:r>
+              <a:rPr sz="1500">
+                <a:solidFill>
+                  <a:srgbClr val="22282E"/>
+                </a:solidFill>
+              </a:rPr>
+              <a:t>•  Nmap, Wireshark, netcat para enumeración de red.</a:t>
+            </a:r>
+          </a:p>
+          <a:p>
+            <a:pPr>
+              <a:spcAft>
+                <a:spcPts val="600"/>
+              </a:spcAft>
+            </a:pPr>
+            <a:r>
+              <a:rPr sz="1500">
+                <a:solidFill>
+                  <a:srgbClr val="22282E"/>
+                </a:solidFill>
+              </a:rPr>
+              <a:t>•  Router/AP de laboratorio aislado o VLAN dedicada para contener el dispositivo.</a:t>
+            </a:r>
+          </a:p>
+          <a:p>
+            <a:pPr>
+              <a:spcAft>
+                <a:spcPts val="600"/>
+              </a:spcAft>
+            </a:pPr>
+            <a:r>
+              <a:rPr sz="1500">
+                <a:solidFill>
+                  <a:srgbClr val="22282E"/>
+                </a:solidFill>
+              </a:rPr>
+              <a:t>•  Burp Suite/mitmproxy para inspeccionar el tráfico app↔nube.</a:t>
             </a:r>
           </a:p>
         </p:txBody>
